--- a/courseware/202611_ADS_W10_Intervals_DP_Intro.pptx
+++ b/courseware/202611_ADS_W10_Intervals_DP_Intro.pptx
@@ -30,6 +30,10 @@
     <p:sldId id="278" r:id="rId29"/>
     <p:sldId id="279" r:id="rId30"/>
     <p:sldId id="280" r:id="rId31"/>
+    <p:sldId id="281" r:id="rId32"/>
+    <p:sldId id="282" r:id="rId33"/>
+    <p:sldId id="283" r:id="rId34"/>
+    <p:sldId id="284" r:id="rId35"/>
   </p:sldIdLst>
   <p:sldSz cx="12191695" cy="6858000" type="screen4x3"/>
   <p:notesSz cx="6858000" cy="9144000"/>
@@ -5493,9 +5497,9 @@
                 <a:tableStyleId>{5C22544A-7EE6-4342-B048-85BDC9FD1C3A}</a:tableStyleId>
               </a:tblPr>
               <a:tblGrid>
-                <a:gridCol w="1382229"/>
-                <a:gridCol w="4699581"/>
-                <a:gridCol w="4976027"/>
+                <a:gridCol w="1494302"/>
+                <a:gridCol w="5080628"/>
+                <a:gridCol w="4482907"/>
               </a:tblGrid>
               <a:tr h="439420">
                 <a:tc>
@@ -5590,7 +5594,7 @@
                           <a:latin typeface="Segoe UI"/>
                           <a:ea typeface="微软雅黑"/>
                         </a:rPr>
-                        <a:t>反例</a:t>
+                        <a:t>不成立会怎样</a:t>
                       </a:r>
                     </a:p>
                   </a:txBody>
@@ -5619,9 +5623,9 @@
                         </a:spcAft>
                       </a:pPr>
                       <a:r>
-                        <a:rPr sz="1700" b="0" i="0">
+                        <a:rPr sz="1700" b="1" i="0">
                           <a:solidFill>
-                            <a:srgbClr val="242A33"/>
+                            <a:srgbClr val="12395B"/>
                           </a:solidFill>
                           <a:latin typeface="Segoe UI"/>
                           <a:ea typeface="微软雅黑"/>
@@ -5694,7 +5698,17 @@
                           <a:latin typeface="Segoe UI"/>
                           <a:ea typeface="微软雅黑"/>
                         </a:rPr>
-                        <a:t>最长路（有环时不成立）</a:t>
+                        <a:t>转移方程写出来了，但</a:t>
+                      </a:r>
+                      <a:r>
+                        <a:rPr sz="1700" b="1" i="0">
+                          <a:solidFill>
+                            <a:srgbClr val="12395B"/>
+                          </a:solidFill>
+                          <a:latin typeface="Segoe UI"/>
+                          <a:ea typeface="微软雅黑"/>
+                        </a:rPr>
+                        <a:t>答案是错的</a:t>
                       </a:r>
                     </a:p>
                   </a:txBody>
@@ -5723,9 +5737,9 @@
                         </a:spcAft>
                       </a:pPr>
                       <a:r>
-                        <a:rPr sz="1700" b="0" i="0">
+                        <a:rPr sz="1700" b="1" i="0">
                           <a:solidFill>
-                            <a:srgbClr val="242A33"/>
+                            <a:srgbClr val="12395B"/>
                           </a:solidFill>
                           <a:latin typeface="Segoe UI"/>
                           <a:ea typeface="微软雅黑"/>
@@ -5798,7 +5812,17 @@
                           <a:latin typeface="Segoe UI"/>
                           <a:ea typeface="微软雅黑"/>
                         </a:rPr>
-                        <a:t>归并排序（子问题不重叠，用分治即可）</a:t>
+                        <a:t>能算对，但</a:t>
+                      </a:r>
+                      <a:r>
+                        <a:rPr sz="1700" b="1" i="0">
+                          <a:solidFill>
+                            <a:srgbClr val="12395B"/>
+                          </a:solidFill>
+                          <a:latin typeface="Segoe UI"/>
+                          <a:ea typeface="微软雅黑"/>
+                        </a:rPr>
+                        <a:t>不如直接分治</a:t>
                       </a:r>
                     </a:p>
                   </a:txBody>
@@ -5851,7 +5875,7 @@
                 <a:latin typeface="Segoe UI"/>
                 <a:ea typeface="微软雅黑"/>
               </a:rPr>
-              <a:t>重叠子问题是 DP 相对于分治的关键区别 —— 所以要把答案存下来</a:t>
+              <a:t>重叠子问题好判断：画调用树，看见重复的子树就是它。难的是上面那条</a:t>
             </a:r>
           </a:p>
         </p:txBody>
@@ -5951,6 +5975,1790 @@
 </file>
 
 <file path=ppt/slides/slide15.xml><?xml version="1.0" encoding="utf-8"?>
+<p:sld xmlns:a="http://schemas.openxmlformats.org/drawingml/2006/main" xmlns:p="http://schemas.openxmlformats.org/presentationml/2006/main" xmlns:r="http://schemas.openxmlformats.org/officeDocument/2006/relationships">
+  <p:cSld>
+    <p:spTree>
+      <p:nvGrpSpPr>
+        <p:cNvPr id="1" name=""/>
+        <p:cNvGrpSpPr/>
+        <p:nvPr/>
+      </p:nvGrpSpPr>
+      <p:grpSpPr/>
+      <p:sp>
+        <p:nvSpPr>
+          <p:cNvPr id="2" name="TextBox 1"/>
+          <p:cNvSpPr txBox="1"/>
+          <p:nvPr/>
+        </p:nvSpPr>
+        <p:spPr>
+          <a:xfrm>
+            <a:off x="566928" y="420624"/>
+            <a:ext cx="11057839" cy="548640"/>
+          </a:xfrm>
+          <a:prstGeom prst="rect">
+            <a:avLst/>
+          </a:prstGeom>
+          <a:noFill/>
+        </p:spPr>
+        <p:txBody>
+          <a:bodyPr wrap="square" lIns="0" rIns="0" tIns="0" bIns="0">
+            <a:noAutofit/>
+          </a:bodyPr>
+          <a:lstStyle/>
+          <a:p>
+            <a:pPr algn="l">
+              <a:spcBef>
+                <a:spcPts val="0"/>
+              </a:spcBef>
+              <a:spcAft>
+                <a:spcPts val="0"/>
+              </a:spcAft>
+            </a:pPr>
+            <a:r>
+              <a:rPr sz="2600" b="1" i="0">
+                <a:solidFill>
+                  <a:srgbClr val="12395B"/>
+                </a:solidFill>
+                <a:latin typeface="Segoe UI"/>
+                <a:ea typeface="微软雅黑"/>
+              </a:rPr>
+              <a:t>最优子结构是</a:t>
+            </a:r>
+            <a:r>
+              <a:rPr sz="2600" b="1" i="0">
+                <a:solidFill>
+                  <a:srgbClr val="12395B"/>
+                </a:solidFill>
+                <a:latin typeface="Segoe UI"/>
+                <a:ea typeface="微软雅黑"/>
+              </a:rPr>
+              <a:t>状态定义</a:t>
+            </a:r>
+            <a:r>
+              <a:rPr sz="2600" b="1" i="0">
+                <a:solidFill>
+                  <a:srgbClr val="12395B"/>
+                </a:solidFill>
+                <a:latin typeface="Segoe UI"/>
+                <a:ea typeface="微软雅黑"/>
+              </a:rPr>
+              <a:t>的性质，不是题目的性质</a:t>
+            </a:r>
+          </a:p>
+        </p:txBody>
+      </p:sp>
+      <p:sp>
+        <p:nvSpPr>
+          <p:cNvPr id="3" name="Rectangle 2"/>
+          <p:cNvSpPr/>
+          <p:nvPr/>
+        </p:nvSpPr>
+        <p:spPr>
+          <a:xfrm>
+            <a:off x="566928" y="1060704"/>
+            <a:ext cx="960120" cy="40640"/>
+          </a:xfrm>
+          <a:prstGeom prst="rect">
+            <a:avLst/>
+          </a:prstGeom>
+          <a:solidFill>
+            <a:srgbClr val="E07B39"/>
+          </a:solidFill>
+          <a:ln>
+            <a:noFill/>
+          </a:ln>
+          <a:effectLst/>
+        </p:spPr>
+        <p:style>
+          <a:lnRef idx="1">
+            <a:schemeClr val="accent1"/>
+          </a:lnRef>
+          <a:fillRef idx="3">
+            <a:schemeClr val="accent1"/>
+          </a:fillRef>
+          <a:effectRef idx="2">
+            <a:schemeClr val="accent1"/>
+          </a:effectRef>
+          <a:fontRef idx="minor">
+            <a:schemeClr val="lt1"/>
+          </a:fontRef>
+        </p:style>
+        <p:txBody>
+          <a:bodyPr rtlCol="0" anchor="ctr"/>
+          <a:lstStyle/>
+          <a:p>
+            <a:pPr algn="ctr"/>
+          </a:p>
+        </p:txBody>
+      </p:sp>
+      <p:sp>
+        <p:nvSpPr>
+          <p:cNvPr id="4" name="Rectangle 3"/>
+          <p:cNvSpPr/>
+          <p:nvPr/>
+        </p:nvSpPr>
+        <p:spPr>
+          <a:xfrm>
+            <a:off x="566928" y="2084831"/>
+            <a:ext cx="11057839" cy="2286000"/>
+          </a:xfrm>
+          <a:prstGeom prst="rect">
+            <a:avLst/>
+          </a:prstGeom>
+          <a:solidFill>
+            <a:srgbClr val="F2F4F7"/>
+          </a:solidFill>
+          <a:ln>
+            <a:noFill/>
+          </a:ln>
+          <a:effectLst/>
+        </p:spPr>
+        <p:style>
+          <a:lnRef idx="1">
+            <a:schemeClr val="accent1"/>
+          </a:lnRef>
+          <a:fillRef idx="3">
+            <a:schemeClr val="accent1"/>
+          </a:fillRef>
+          <a:effectRef idx="2">
+            <a:schemeClr val="accent1"/>
+          </a:effectRef>
+          <a:fontRef idx="minor">
+            <a:schemeClr val="lt1"/>
+          </a:fontRef>
+        </p:style>
+        <p:txBody>
+          <a:bodyPr rtlCol="0" anchor="ctr"/>
+          <a:lstStyle/>
+          <a:p>
+            <a:pPr algn="ctr"/>
+          </a:p>
+        </p:txBody>
+      </p:sp>
+      <p:sp>
+        <p:nvSpPr>
+          <p:cNvPr id="5" name="Rectangle 4"/>
+          <p:cNvSpPr/>
+          <p:nvPr/>
+        </p:nvSpPr>
+        <p:spPr>
+          <a:xfrm>
+            <a:off x="566928" y="2084831"/>
+            <a:ext cx="82296" cy="2286000"/>
+          </a:xfrm>
+          <a:prstGeom prst="rect">
+            <a:avLst/>
+          </a:prstGeom>
+          <a:solidFill>
+            <a:srgbClr val="E07B39"/>
+          </a:solidFill>
+          <a:ln>
+            <a:noFill/>
+          </a:ln>
+          <a:effectLst/>
+        </p:spPr>
+        <p:style>
+          <a:lnRef idx="1">
+            <a:schemeClr val="accent1"/>
+          </a:lnRef>
+          <a:fillRef idx="3">
+            <a:schemeClr val="accent1"/>
+          </a:fillRef>
+          <a:effectRef idx="2">
+            <a:schemeClr val="accent1"/>
+          </a:effectRef>
+          <a:fontRef idx="minor">
+            <a:schemeClr val="lt1"/>
+          </a:fontRef>
+        </p:style>
+        <p:txBody>
+          <a:bodyPr rtlCol="0" anchor="ctr"/>
+          <a:lstStyle/>
+          <a:p>
+            <a:pPr algn="ctr"/>
+          </a:p>
+        </p:txBody>
+      </p:sp>
+      <p:sp>
+        <p:nvSpPr>
+          <p:cNvPr id="6" name="TextBox 5"/>
+          <p:cNvSpPr txBox="1"/>
+          <p:nvPr/>
+        </p:nvSpPr>
+        <p:spPr>
+          <a:xfrm>
+            <a:off x="1069848" y="2377440"/>
+            <a:ext cx="10051999" cy="1737360"/>
+          </a:xfrm>
+          <a:prstGeom prst="rect">
+            <a:avLst/>
+          </a:prstGeom>
+          <a:noFill/>
+        </p:spPr>
+        <p:txBody>
+          <a:bodyPr wrap="square" lIns="0" rIns="0" tIns="0" bIns="0">
+            <a:noAutofit/>
+          </a:bodyPr>
+          <a:lstStyle/>
+          <a:p>
+            <a:pPr algn="l">
+              <a:lnSpc>
+                <a:spcPct val="145000"/>
+              </a:lnSpc>
+              <a:spcBef>
+                <a:spcPts val="0"/>
+              </a:spcBef>
+              <a:spcAft>
+                <a:spcPts val="0"/>
+              </a:spcAft>
+            </a:pPr>
+            <a:r>
+              <a:rPr sz="2200" b="1" i="0">
+                <a:solidFill>
+                  <a:srgbClr val="12395B"/>
+                </a:solidFill>
+                <a:latin typeface="Segoe UI"/>
+                <a:ea typeface="微软雅黑"/>
+              </a:rPr>
+              <a:t>同一道题，状态定义得好就有，少定义一维就没有 —— "这题没有最优子结构"十有八九是"我的状态少了一维"。</a:t>
+            </a:r>
+          </a:p>
+        </p:txBody>
+      </p:sp>
+      <p:sp>
+        <p:nvSpPr>
+          <p:cNvPr id="7" name="TextBox 6"/>
+          <p:cNvSpPr txBox="1"/>
+          <p:nvPr/>
+        </p:nvSpPr>
+        <p:spPr>
+          <a:xfrm>
+            <a:off x="566928" y="6327648"/>
+            <a:ext cx="8229600" cy="310896"/>
+          </a:xfrm>
+          <a:prstGeom prst="rect">
+            <a:avLst/>
+          </a:prstGeom>
+          <a:noFill/>
+        </p:spPr>
+        <p:txBody>
+          <a:bodyPr wrap="square" lIns="0" rIns="0" tIns="0" bIns="0">
+            <a:noAutofit/>
+          </a:bodyPr>
+          <a:lstStyle/>
+          <a:p>
+            <a:pPr algn="l">
+              <a:spcBef>
+                <a:spcPts val="0"/>
+              </a:spcBef>
+              <a:spcAft>
+                <a:spcPts val="0"/>
+              </a:spcAft>
+            </a:pPr>
+            <a:r>
+              <a:rPr sz="1000" b="0" i="0">
+                <a:solidFill>
+                  <a:srgbClr val="6B7582"/>
+                </a:solidFill>
+                <a:latin typeface="Segoe UI"/>
+                <a:ea typeface="微软雅黑"/>
+              </a:rPr>
+              <a:t>计算概论（B） · 第10周 · 闫宏飞 · 2026 Fall</a:t>
+            </a:r>
+          </a:p>
+        </p:txBody>
+      </p:sp>
+      <p:sp>
+        <p:nvSpPr>
+          <p:cNvPr id="8" name="TextBox 7"/>
+          <p:cNvSpPr txBox="1"/>
+          <p:nvPr/>
+        </p:nvSpPr>
+        <p:spPr>
+          <a:xfrm>
+            <a:off x="10710367" y="6327648"/>
+            <a:ext cx="914400" cy="310896"/>
+          </a:xfrm>
+          <a:prstGeom prst="rect">
+            <a:avLst/>
+          </a:prstGeom>
+          <a:noFill/>
+        </p:spPr>
+        <p:txBody>
+          <a:bodyPr wrap="square" lIns="0" rIns="0" tIns="0" bIns="0">
+            <a:noAutofit/>
+          </a:bodyPr>
+          <a:lstStyle/>
+          <a:p>
+            <a:pPr algn="r">
+              <a:spcBef>
+                <a:spcPts val="0"/>
+              </a:spcBef>
+              <a:spcAft>
+                <a:spcPts val="0"/>
+              </a:spcAft>
+            </a:pPr>
+            <a:r>
+              <a:rPr sz="1000" b="0" i="0">
+                <a:solidFill>
+                  <a:srgbClr val="6B7582"/>
+                </a:solidFill>
+                <a:latin typeface="Segoe UI"/>
+                <a:ea typeface="微软雅黑"/>
+              </a:rPr>
+              <a:t>15</a:t>
+            </a:r>
+          </a:p>
+        </p:txBody>
+      </p:sp>
+    </p:spTree>
+  </p:cSld>
+  <p:clrMapOvr>
+    <a:masterClrMapping/>
+  </p:clrMapOvr>
+</p:sld>
+</file>
+
+<file path=ppt/slides/slide16.xml><?xml version="1.0" encoding="utf-8"?>
+<p:sld xmlns:a="http://schemas.openxmlformats.org/drawingml/2006/main" xmlns:p="http://schemas.openxmlformats.org/presentationml/2006/main" xmlns:r="http://schemas.openxmlformats.org/officeDocument/2006/relationships">
+  <p:cSld>
+    <p:spTree>
+      <p:nvGrpSpPr>
+        <p:cNvPr id="1" name=""/>
+        <p:cNvGrpSpPr/>
+        <p:nvPr/>
+      </p:nvGrpSpPr>
+      <p:grpSpPr/>
+      <p:sp>
+        <p:nvSpPr>
+          <p:cNvPr id="2" name="TextBox 1"/>
+          <p:cNvSpPr txBox="1"/>
+          <p:nvPr/>
+        </p:nvSpPr>
+        <p:spPr>
+          <a:xfrm>
+            <a:off x="566928" y="420624"/>
+            <a:ext cx="11057839" cy="548640"/>
+          </a:xfrm>
+          <a:prstGeom prst="rect">
+            <a:avLst/>
+          </a:prstGeom>
+          <a:noFill/>
+        </p:spPr>
+        <p:txBody>
+          <a:bodyPr wrap="square" lIns="0" rIns="0" tIns="0" bIns="0">
+            <a:noAutofit/>
+          </a:bodyPr>
+          <a:lstStyle/>
+          <a:p>
+            <a:pPr algn="l">
+              <a:spcBef>
+                <a:spcPts val="0"/>
+              </a:spcBef>
+              <a:spcAft>
+                <a:spcPts val="0"/>
+              </a:spcAft>
+            </a:pPr>
+            <a:r>
+              <a:rPr sz="2600" b="1" i="0">
+                <a:solidFill>
+                  <a:srgbClr val="12395B"/>
+                </a:solidFill>
+                <a:latin typeface="Segoe UI"/>
+                <a:ea typeface="微软雅黑"/>
+              </a:rPr>
+              <a:t>一个能手算的反例：路径和必须是奇数</a:t>
+            </a:r>
+          </a:p>
+        </p:txBody>
+      </p:sp>
+      <p:sp>
+        <p:nvSpPr>
+          <p:cNvPr id="3" name="Rectangle 2"/>
+          <p:cNvSpPr/>
+          <p:nvPr/>
+        </p:nvSpPr>
+        <p:spPr>
+          <a:xfrm>
+            <a:off x="566928" y="1060704"/>
+            <a:ext cx="960120" cy="40640"/>
+          </a:xfrm>
+          <a:prstGeom prst="rect">
+            <a:avLst/>
+          </a:prstGeom>
+          <a:solidFill>
+            <a:srgbClr val="E07B39"/>
+          </a:solidFill>
+          <a:ln>
+            <a:noFill/>
+          </a:ln>
+          <a:effectLst/>
+        </p:spPr>
+        <p:style>
+          <a:lnRef idx="1">
+            <a:schemeClr val="accent1"/>
+          </a:lnRef>
+          <a:fillRef idx="3">
+            <a:schemeClr val="accent1"/>
+          </a:fillRef>
+          <a:effectRef idx="2">
+            <a:schemeClr val="accent1"/>
+          </a:effectRef>
+          <a:fontRef idx="minor">
+            <a:schemeClr val="lt1"/>
+          </a:fontRef>
+        </p:style>
+        <p:txBody>
+          <a:bodyPr rtlCol="0" anchor="ctr"/>
+          <a:lstStyle/>
+          <a:p>
+            <a:pPr algn="ctr"/>
+          </a:p>
+        </p:txBody>
+      </p:sp>
+      <p:sp>
+        <p:nvSpPr>
+          <p:cNvPr id="4" name="TextBox 3"/>
+          <p:cNvSpPr txBox="1"/>
+          <p:nvPr/>
+        </p:nvSpPr>
+        <p:spPr>
+          <a:xfrm>
+            <a:off x="566928" y="2397760"/>
+            <a:ext cx="11057839" cy="2245360"/>
+          </a:xfrm>
+          <a:prstGeom prst="rect">
+            <a:avLst/>
+          </a:prstGeom>
+          <a:noFill/>
+        </p:spPr>
+        <p:txBody>
+          <a:bodyPr wrap="square" lIns="0" rIns="0" tIns="0" bIns="0">
+            <a:noAutofit/>
+          </a:bodyPr>
+          <a:lstStyle/>
+          <a:p>
+            <a:pPr algn="l">
+              <a:lnSpc>
+                <a:spcPts val="2210"/>
+              </a:lnSpc>
+              <a:spcBef>
+                <a:spcPts val="0"/>
+              </a:spcBef>
+              <a:spcAft>
+                <a:spcPts val="0"/>
+              </a:spcAft>
+            </a:pPr>
+            <a:r>
+              <a:rPr sz="1700" b="0" i="0">
+                <a:solidFill>
+                  <a:srgbClr val="12395B"/>
+                </a:solidFill>
+                <a:latin typeface="Consolas"/>
+                <a:ea typeface="Consolas"/>
+              </a:rPr>
+              <a:t> </a:t>
+            </a:r>
+          </a:p>
+          <a:p>
+            <a:pPr algn="l">
+              <a:lnSpc>
+                <a:spcPts val="2210"/>
+              </a:lnSpc>
+              <a:spcBef>
+                <a:spcPts val="0"/>
+              </a:spcBef>
+              <a:spcAft>
+                <a:spcPts val="0"/>
+              </a:spcAft>
+            </a:pPr>
+            <a:r>
+              <a:rPr sz="1700" b="0" i="0">
+                <a:solidFill>
+                  <a:srgbClr val="12395B"/>
+                </a:solidFill>
+                <a:latin typeface="Consolas"/>
+                <a:ea typeface="Consolas"/>
+              </a:rPr>
+              <a:t>         6                 全部 8 条路径：</a:t>
+            </a:r>
+          </a:p>
+          <a:p>
+            <a:pPr algn="l">
+              <a:lnSpc>
+                <a:spcPts val="2210"/>
+              </a:lnSpc>
+              <a:spcBef>
+                <a:spcPts val="0"/>
+              </a:spcBef>
+              <a:spcAft>
+                <a:spcPts val="0"/>
+              </a:spcAft>
+            </a:pPr>
+            <a:r>
+              <a:rPr sz="1700" b="0" i="0">
+                <a:solidFill>
+                  <a:srgbClr val="12395B"/>
+                </a:solidFill>
+                <a:latin typeface="Consolas"/>
+                <a:ea typeface="Consolas"/>
+              </a:rPr>
+              <a:t>       7   9                 6-7-0-7 = 20      6-9-3-4 = 22</a:t>
+            </a:r>
+          </a:p>
+          <a:p>
+            <a:pPr algn="l">
+              <a:lnSpc>
+                <a:spcPts val="2210"/>
+              </a:lnSpc>
+              <a:spcBef>
+                <a:spcPts val="0"/>
+              </a:spcBef>
+              <a:spcAft>
+                <a:spcPts val="0"/>
+              </a:spcAft>
+            </a:pPr>
+            <a:r>
+              <a:rPr sz="1700" b="0" i="0">
+                <a:solidFill>
+                  <a:srgbClr val="12395B"/>
+                </a:solidFill>
+                <a:latin typeface="Consolas"/>
+                <a:ea typeface="Consolas"/>
+              </a:rPr>
+              <a:t>     0   3   7               6-7-0-4 = 17      6-9-3-2 = 20   &lt;- 唯一的奇数</a:t>
+            </a:r>
+          </a:p>
+          <a:p>
+            <a:pPr algn="l">
+              <a:lnSpc>
+                <a:spcPts val="2210"/>
+              </a:lnSpc>
+              <a:spcBef>
+                <a:spcPts val="0"/>
+              </a:spcBef>
+              <a:spcAft>
+                <a:spcPts val="0"/>
+              </a:spcAft>
+            </a:pPr>
+            <a:r>
+              <a:rPr sz="1700" b="0" i="0">
+                <a:solidFill>
+                  <a:srgbClr val="12395B"/>
+                </a:solidFill>
+                <a:latin typeface="Consolas"/>
+                <a:ea typeface="Consolas"/>
+              </a:rPr>
+              <a:t>   7   4   2   0             6-7-3-4 = 20      6-9-7-2 = 24</a:t>
+            </a:r>
+          </a:p>
+          <a:p>
+            <a:pPr algn="l">
+              <a:lnSpc>
+                <a:spcPts val="2210"/>
+              </a:lnSpc>
+              <a:spcBef>
+                <a:spcPts val="0"/>
+              </a:spcBef>
+              <a:spcAft>
+                <a:spcPts val="0"/>
+              </a:spcAft>
+            </a:pPr>
+            <a:r>
+              <a:rPr sz="1700" b="0" i="0">
+                <a:solidFill>
+                  <a:srgbClr val="12395B"/>
+                </a:solidFill>
+                <a:latin typeface="Consolas"/>
+                <a:ea typeface="Consolas"/>
+              </a:rPr>
+              <a:t>                             6-7-3-2 = 18      6-9-7-0 = 22</a:t>
+            </a:r>
+          </a:p>
+          <a:p>
+            <a:pPr algn="l">
+              <a:lnSpc>
+                <a:spcPts val="2210"/>
+              </a:lnSpc>
+              <a:spcBef>
+                <a:spcPts val="0"/>
+              </a:spcBef>
+              <a:spcAft>
+                <a:spcPts val="0"/>
+              </a:spcAft>
+            </a:pPr>
+            <a:r>
+              <a:rPr sz="1700" b="0" i="0">
+                <a:solidFill>
+                  <a:srgbClr val="12395B"/>
+                </a:solidFill>
+                <a:latin typeface="Consolas"/>
+                <a:ea typeface="Consolas"/>
+              </a:rPr>
+              <a:t>   每步走左下或右下</a:t>
+            </a:r>
+          </a:p>
+          <a:p>
+            <a:pPr algn="l">
+              <a:lnSpc>
+                <a:spcPts val="2210"/>
+              </a:lnSpc>
+              <a:spcBef>
+                <a:spcPts val="0"/>
+              </a:spcBef>
+              <a:spcAft>
+                <a:spcPts val="0"/>
+              </a:spcAft>
+            </a:pPr>
+            <a:r>
+              <a:rPr sz="1700" b="0" i="0">
+                <a:solidFill>
+                  <a:srgbClr val="12395B"/>
+                </a:solidFill>
+                <a:latin typeface="Consolas"/>
+                <a:ea typeface="Consolas"/>
+              </a:rPr>
+              <a:t>                           答案 = 17</a:t>
+            </a:r>
+          </a:p>
+        </p:txBody>
+      </p:sp>
+      <p:sp>
+        <p:nvSpPr>
+          <p:cNvPr id="5" name="TextBox 4"/>
+          <p:cNvSpPr txBox="1"/>
+          <p:nvPr/>
+        </p:nvSpPr>
+        <p:spPr>
+          <a:xfrm>
+            <a:off x="566928" y="5888736"/>
+            <a:ext cx="11057839" cy="329184"/>
+          </a:xfrm>
+          <a:prstGeom prst="rect">
+            <a:avLst/>
+          </a:prstGeom>
+          <a:noFill/>
+        </p:spPr>
+        <p:txBody>
+          <a:bodyPr wrap="square" lIns="0" rIns="0" tIns="0" bIns="0">
+            <a:noAutofit/>
+          </a:bodyPr>
+          <a:lstStyle/>
+          <a:p>
+            <a:pPr algn="l">
+              <a:spcBef>
+                <a:spcPts val="0"/>
+              </a:spcBef>
+              <a:spcAft>
+                <a:spcPts val="0"/>
+              </a:spcAft>
+            </a:pPr>
+            <a:r>
+              <a:rPr sz="1300" b="0" i="0">
+                <a:solidFill>
+                  <a:srgbClr val="6B7582"/>
+                </a:solidFill>
+                <a:latin typeface="Segoe UI"/>
+                <a:ea typeface="微软雅黑"/>
+              </a:rPr>
+              <a:t>原题问最大路径和；这里加一条：路径和必须是奇数，求最大的那个</a:t>
+            </a:r>
+          </a:p>
+        </p:txBody>
+      </p:sp>
+      <p:sp>
+        <p:nvSpPr>
+          <p:cNvPr id="6" name="TextBox 5"/>
+          <p:cNvSpPr txBox="1"/>
+          <p:nvPr/>
+        </p:nvSpPr>
+        <p:spPr>
+          <a:xfrm>
+            <a:off x="566928" y="6327648"/>
+            <a:ext cx="8229600" cy="310896"/>
+          </a:xfrm>
+          <a:prstGeom prst="rect">
+            <a:avLst/>
+          </a:prstGeom>
+          <a:noFill/>
+        </p:spPr>
+        <p:txBody>
+          <a:bodyPr wrap="square" lIns="0" rIns="0" tIns="0" bIns="0">
+            <a:noAutofit/>
+          </a:bodyPr>
+          <a:lstStyle/>
+          <a:p>
+            <a:pPr algn="l">
+              <a:spcBef>
+                <a:spcPts val="0"/>
+              </a:spcBef>
+              <a:spcAft>
+                <a:spcPts val="0"/>
+              </a:spcAft>
+            </a:pPr>
+            <a:r>
+              <a:rPr sz="1000" b="0" i="0">
+                <a:solidFill>
+                  <a:srgbClr val="6B7582"/>
+                </a:solidFill>
+                <a:latin typeface="Segoe UI"/>
+                <a:ea typeface="微软雅黑"/>
+              </a:rPr>
+              <a:t>计算概论（B） · 第10周 · 闫宏飞 · 2026 Fall</a:t>
+            </a:r>
+          </a:p>
+        </p:txBody>
+      </p:sp>
+      <p:sp>
+        <p:nvSpPr>
+          <p:cNvPr id="7" name="TextBox 6"/>
+          <p:cNvSpPr txBox="1"/>
+          <p:nvPr/>
+        </p:nvSpPr>
+        <p:spPr>
+          <a:xfrm>
+            <a:off x="10710367" y="6327648"/>
+            <a:ext cx="914400" cy="310896"/>
+          </a:xfrm>
+          <a:prstGeom prst="rect">
+            <a:avLst/>
+          </a:prstGeom>
+          <a:noFill/>
+        </p:spPr>
+        <p:txBody>
+          <a:bodyPr wrap="square" lIns="0" rIns="0" tIns="0" bIns="0">
+            <a:noAutofit/>
+          </a:bodyPr>
+          <a:lstStyle/>
+          <a:p>
+            <a:pPr algn="r">
+              <a:spcBef>
+                <a:spcPts val="0"/>
+              </a:spcBef>
+              <a:spcAft>
+                <a:spcPts val="0"/>
+              </a:spcAft>
+            </a:pPr>
+            <a:r>
+              <a:rPr sz="1000" b="0" i="0">
+                <a:solidFill>
+                  <a:srgbClr val="6B7582"/>
+                </a:solidFill>
+                <a:latin typeface="Segoe UI"/>
+                <a:ea typeface="微软雅黑"/>
+              </a:rPr>
+              <a:t>16</a:t>
+            </a:r>
+          </a:p>
+        </p:txBody>
+      </p:sp>
+    </p:spTree>
+  </p:cSld>
+  <p:clrMapOvr>
+    <a:masterClrMapping/>
+  </p:clrMapOvr>
+</p:sld>
+</file>
+
+<file path=ppt/slides/slide17.xml><?xml version="1.0" encoding="utf-8"?>
+<p:sld xmlns:a="http://schemas.openxmlformats.org/drawingml/2006/main" xmlns:p="http://schemas.openxmlformats.org/presentationml/2006/main" xmlns:r="http://schemas.openxmlformats.org/officeDocument/2006/relationships">
+  <p:cSld>
+    <p:spTree>
+      <p:nvGrpSpPr>
+        <p:cNvPr id="1" name=""/>
+        <p:cNvGrpSpPr/>
+        <p:nvPr/>
+      </p:nvGrpSpPr>
+      <p:grpSpPr/>
+      <p:sp>
+        <p:nvSpPr>
+          <p:cNvPr id="2" name="TextBox 1"/>
+          <p:cNvSpPr txBox="1"/>
+          <p:nvPr/>
+        </p:nvSpPr>
+        <p:spPr>
+          <a:xfrm>
+            <a:off x="566928" y="420624"/>
+            <a:ext cx="11057839" cy="548640"/>
+          </a:xfrm>
+          <a:prstGeom prst="rect">
+            <a:avLst/>
+          </a:prstGeom>
+          <a:noFill/>
+        </p:spPr>
+        <p:txBody>
+          <a:bodyPr wrap="square" lIns="0" rIns="0" tIns="0" bIns="0">
+            <a:noAutofit/>
+          </a:bodyPr>
+          <a:lstStyle/>
+          <a:p>
+            <a:pPr algn="l">
+              <a:spcBef>
+                <a:spcPts val="0"/>
+              </a:spcBef>
+              <a:spcAft>
+                <a:spcPts val="0"/>
+              </a:spcAft>
+            </a:pPr>
+            <a:r>
+              <a:rPr sz="2600" b="1" i="0">
+                <a:solidFill>
+                  <a:srgbClr val="12395B"/>
+                </a:solidFill>
+                <a:latin typeface="Segoe UI"/>
+                <a:ea typeface="微软雅黑"/>
+              </a:rPr>
+              <a:t>最自然的状态，会告诉你「无解」</a:t>
+            </a:r>
+          </a:p>
+        </p:txBody>
+      </p:sp>
+      <p:sp>
+        <p:nvSpPr>
+          <p:cNvPr id="3" name="Rectangle 2"/>
+          <p:cNvSpPr/>
+          <p:nvPr/>
+        </p:nvSpPr>
+        <p:spPr>
+          <a:xfrm>
+            <a:off x="566928" y="1060704"/>
+            <a:ext cx="960120" cy="40640"/>
+          </a:xfrm>
+          <a:prstGeom prst="rect">
+            <a:avLst/>
+          </a:prstGeom>
+          <a:solidFill>
+            <a:srgbClr val="E07B39"/>
+          </a:solidFill>
+          <a:ln>
+            <a:noFill/>
+          </a:ln>
+          <a:effectLst/>
+        </p:spPr>
+        <p:style>
+          <a:lnRef idx="1">
+            <a:schemeClr val="accent1"/>
+          </a:lnRef>
+          <a:fillRef idx="3">
+            <a:schemeClr val="accent1"/>
+          </a:fillRef>
+          <a:effectRef idx="2">
+            <a:schemeClr val="accent1"/>
+          </a:effectRef>
+          <a:fontRef idx="minor">
+            <a:schemeClr val="lt1"/>
+          </a:fontRef>
+        </p:style>
+        <p:txBody>
+          <a:bodyPr rtlCol="0" anchor="ctr"/>
+          <a:lstStyle/>
+          <a:p>
+            <a:pPr algn="ctr"/>
+          </a:p>
+        </p:txBody>
+      </p:sp>
+      <p:sp>
+        <p:nvSpPr>
+          <p:cNvPr id="4" name="Rectangle 3"/>
+          <p:cNvSpPr/>
+          <p:nvPr/>
+        </p:nvSpPr>
+        <p:spPr>
+          <a:xfrm>
+            <a:off x="566928" y="1298448"/>
+            <a:ext cx="11057839" cy="3094355"/>
+          </a:xfrm>
+          <a:prstGeom prst="rect">
+            <a:avLst/>
+          </a:prstGeom>
+          <a:solidFill>
+            <a:srgbClr val="F6F7F9"/>
+          </a:solidFill>
+          <a:ln w="9525">
+            <a:solidFill>
+              <a:srgbClr val="D6DCE4"/>
+            </a:solidFill>
+          </a:ln>
+          <a:effectLst/>
+        </p:spPr>
+        <p:style>
+          <a:lnRef idx="1">
+            <a:schemeClr val="accent1"/>
+          </a:lnRef>
+          <a:fillRef idx="3">
+            <a:schemeClr val="accent1"/>
+          </a:fillRef>
+          <a:effectRef idx="2">
+            <a:schemeClr val="accent1"/>
+          </a:effectRef>
+          <a:fontRef idx="minor">
+            <a:schemeClr val="lt1"/>
+          </a:fontRef>
+        </p:style>
+        <p:txBody>
+          <a:bodyPr rtlCol="0" anchor="ctr"/>
+          <a:lstStyle/>
+          <a:p>
+            <a:pPr algn="ctr"/>
+          </a:p>
+        </p:txBody>
+      </p:sp>
+      <p:sp>
+        <p:nvSpPr>
+          <p:cNvPr id="5" name="TextBox 4"/>
+          <p:cNvSpPr txBox="1"/>
+          <p:nvPr/>
+        </p:nvSpPr>
+        <p:spPr>
+          <a:xfrm>
+            <a:off x="822960" y="1399032"/>
+            <a:ext cx="10545775" cy="2893187"/>
+          </a:xfrm>
+          <a:prstGeom prst="rect">
+            <a:avLst/>
+          </a:prstGeom>
+          <a:noFill/>
+        </p:spPr>
+        <p:txBody>
+          <a:bodyPr wrap="square" lIns="0" rIns="0" tIns="0" bIns="0">
+            <a:noAutofit/>
+          </a:bodyPr>
+          <a:lstStyle/>
+          <a:p>
+            <a:pPr algn="l">
+              <a:lnSpc>
+                <a:spcPts val="2015"/>
+              </a:lnSpc>
+              <a:spcBef>
+                <a:spcPts val="0"/>
+              </a:spcBef>
+              <a:spcAft>
+                <a:spcPts val="0"/>
+              </a:spcAft>
+            </a:pPr>
+            <a:r>
+              <a:rPr sz="1550" b="0" i="0">
+                <a:solidFill>
+                  <a:srgbClr val="242A33"/>
+                </a:solidFill>
+                <a:latin typeface="Consolas"/>
+                <a:ea typeface="Consolas"/>
+              </a:rPr>
+              <a:t>def naive_odd(tri):</a:t>
+            </a:r>
+          </a:p>
+          <a:p>
+            <a:pPr algn="l">
+              <a:lnSpc>
+                <a:spcPts val="2015"/>
+              </a:lnSpc>
+              <a:spcBef>
+                <a:spcPts val="0"/>
+              </a:spcBef>
+              <a:spcAft>
+                <a:spcPts val="0"/>
+              </a:spcAft>
+            </a:pPr>
+            <a:r>
+              <a:rPr sz="1550" b="0" i="0">
+                <a:solidFill>
+                  <a:srgbClr val="242A33"/>
+                </a:solidFill>
+                <a:latin typeface="Consolas"/>
+                <a:ea typeface="Consolas"/>
+              </a:rPr>
+              <a:t>    """朴素状态：dp[i][j] = 到 (i, j) 的最大路径和，最后在底行里挑奇数"""</a:t>
+            </a:r>
+          </a:p>
+          <a:p>
+            <a:pPr algn="l">
+              <a:lnSpc>
+                <a:spcPts val="2015"/>
+              </a:lnSpc>
+              <a:spcBef>
+                <a:spcPts val="0"/>
+              </a:spcBef>
+              <a:spcAft>
+                <a:spcPts val="0"/>
+              </a:spcAft>
+            </a:pPr>
+            <a:r>
+              <a:rPr sz="1550" b="0" i="0">
+                <a:solidFill>
+                  <a:srgbClr val="242A33"/>
+                </a:solidFill>
+                <a:latin typeface="Consolas"/>
+                <a:ea typeface="Consolas"/>
+              </a:rPr>
+              <a:t>    dp = [tri[0][:]]</a:t>
+            </a:r>
+          </a:p>
+          <a:p>
+            <a:pPr algn="l">
+              <a:lnSpc>
+                <a:spcPts val="2015"/>
+              </a:lnSpc>
+              <a:spcBef>
+                <a:spcPts val="0"/>
+              </a:spcBef>
+              <a:spcAft>
+                <a:spcPts val="0"/>
+              </a:spcAft>
+            </a:pPr>
+            <a:r>
+              <a:rPr sz="1550" b="0" i="0">
+                <a:solidFill>
+                  <a:srgbClr val="242A33"/>
+                </a:solidFill>
+                <a:latin typeface="Consolas"/>
+                <a:ea typeface="Consolas"/>
+              </a:rPr>
+              <a:t>    for i in range(1, len(tri)):</a:t>
+            </a:r>
+          </a:p>
+          <a:p>
+            <a:pPr algn="l">
+              <a:lnSpc>
+                <a:spcPts val="2015"/>
+              </a:lnSpc>
+              <a:spcBef>
+                <a:spcPts val="0"/>
+              </a:spcBef>
+              <a:spcAft>
+                <a:spcPts val="0"/>
+              </a:spcAft>
+            </a:pPr>
+            <a:r>
+              <a:rPr sz="1550" b="0" i="0">
+                <a:solidFill>
+                  <a:srgbClr val="242A33"/>
+                </a:solidFill>
+                <a:latin typeface="Consolas"/>
+                <a:ea typeface="Consolas"/>
+              </a:rPr>
+              <a:t>        dp.append([max(dp[i - 1][k] for k in (j - 1, j) if 0 &lt;= k &lt;= i - 1)</a:t>
+            </a:r>
+          </a:p>
+          <a:p>
+            <a:pPr algn="l">
+              <a:lnSpc>
+                <a:spcPts val="2015"/>
+              </a:lnSpc>
+              <a:spcBef>
+                <a:spcPts val="0"/>
+              </a:spcBef>
+              <a:spcAft>
+                <a:spcPts val="0"/>
+              </a:spcAft>
+            </a:pPr>
+            <a:r>
+              <a:rPr sz="1550" b="0" i="0">
+                <a:solidFill>
+                  <a:srgbClr val="242A33"/>
+                </a:solidFill>
+                <a:latin typeface="Consolas"/>
+                <a:ea typeface="Consolas"/>
+              </a:rPr>
+              <a:t>                   + tri[i][j] for j in range(i + 1)])</a:t>
+            </a:r>
+          </a:p>
+          <a:p>
+            <a:pPr algn="l">
+              <a:lnSpc>
+                <a:spcPts val="2015"/>
+              </a:lnSpc>
+              <a:spcBef>
+                <a:spcPts val="0"/>
+              </a:spcBef>
+              <a:spcAft>
+                <a:spcPts val="0"/>
+              </a:spcAft>
+            </a:pPr>
+            <a:r>
+              <a:rPr sz="1550" b="0" i="0">
+                <a:solidFill>
+                  <a:srgbClr val="242A33"/>
+                </a:solidFill>
+                <a:latin typeface="Consolas"/>
+                <a:ea typeface="Consolas"/>
+              </a:rPr>
+              <a:t>    odd = [v for v in dp[-1] if v % 2 == 1]</a:t>
+            </a:r>
+          </a:p>
+          <a:p>
+            <a:pPr algn="l">
+              <a:lnSpc>
+                <a:spcPts val="2015"/>
+              </a:lnSpc>
+              <a:spcBef>
+                <a:spcPts val="0"/>
+              </a:spcBef>
+              <a:spcAft>
+                <a:spcPts val="0"/>
+              </a:spcAft>
+            </a:pPr>
+            <a:r>
+              <a:rPr sz="1550" b="0" i="0">
+                <a:solidFill>
+                  <a:srgbClr val="242A33"/>
+                </a:solidFill>
+                <a:latin typeface="Consolas"/>
+                <a:ea typeface="Consolas"/>
+              </a:rPr>
+              <a:t>    return max(odd) if odd else -1</a:t>
+            </a:r>
+          </a:p>
+          <a:p>
+            <a:pPr algn="l">
+              <a:lnSpc>
+                <a:spcPts val="2015"/>
+              </a:lnSpc>
+              <a:spcBef>
+                <a:spcPts val="0"/>
+              </a:spcBef>
+              <a:spcAft>
+                <a:spcPts val="0"/>
+              </a:spcAft>
+            </a:pPr>
+            <a:r>
+              <a:rPr sz="1550" b="0" i="0">
+                <a:solidFill>
+                  <a:srgbClr val="242A33"/>
+                </a:solidFill>
+                <a:latin typeface="Consolas"/>
+                <a:ea typeface="Consolas"/>
+              </a:rPr>
+              <a:t> </a:t>
+            </a:r>
+          </a:p>
+          <a:p>
+            <a:pPr algn="l">
+              <a:lnSpc>
+                <a:spcPts val="2015"/>
+              </a:lnSpc>
+              <a:spcBef>
+                <a:spcPts val="0"/>
+              </a:spcBef>
+              <a:spcAft>
+                <a:spcPts val="0"/>
+              </a:spcAft>
+            </a:pPr>
+            <a:r>
+              <a:rPr sz="1550" b="0" i="0">
+                <a:solidFill>
+                  <a:srgbClr val="242A33"/>
+                </a:solidFill>
+                <a:latin typeface="Consolas"/>
+                <a:ea typeface="Consolas"/>
+              </a:rPr>
+              <a:t> </a:t>
+            </a:r>
+          </a:p>
+          <a:p>
+            <a:pPr algn="l">
+              <a:lnSpc>
+                <a:spcPts val="2015"/>
+              </a:lnSpc>
+              <a:spcBef>
+                <a:spcPts val="0"/>
+              </a:spcBef>
+              <a:spcAft>
+                <a:spcPts val="0"/>
+              </a:spcAft>
+            </a:pPr>
+            <a:r>
+              <a:rPr sz="1550" b="0" i="0">
+                <a:solidFill>
+                  <a:srgbClr val="242A33"/>
+                </a:solidFill>
+                <a:latin typeface="Consolas"/>
+                <a:ea typeface="Consolas"/>
+              </a:rPr>
+              <a:t># 底行算出来是 [20, 22, 24, 22] —— 全是偶数，于是返回 -1</a:t>
+            </a:r>
+          </a:p>
+        </p:txBody>
+      </p:sp>
+      <p:sp>
+        <p:nvSpPr>
+          <p:cNvPr id="6" name="TextBox 5"/>
+          <p:cNvSpPr txBox="1"/>
+          <p:nvPr/>
+        </p:nvSpPr>
+        <p:spPr>
+          <a:xfrm>
+            <a:off x="566928" y="4511675"/>
+            <a:ext cx="11057839" cy="329184"/>
+          </a:xfrm>
+          <a:prstGeom prst="rect">
+            <a:avLst/>
+          </a:prstGeom>
+          <a:noFill/>
+        </p:spPr>
+        <p:txBody>
+          <a:bodyPr wrap="square" lIns="0" rIns="0" tIns="0" bIns="0">
+            <a:noAutofit/>
+          </a:bodyPr>
+          <a:lstStyle/>
+          <a:p>
+            <a:pPr algn="l">
+              <a:spcBef>
+                <a:spcPts val="0"/>
+              </a:spcBef>
+              <a:spcAft>
+                <a:spcPts val="0"/>
+              </a:spcAft>
+            </a:pPr>
+            <a:r>
+              <a:rPr sz="1300" b="0" i="0">
+                <a:solidFill>
+                  <a:srgbClr val="6B7582"/>
+                </a:solidFill>
+                <a:latin typeface="Segoe UI"/>
+                <a:ea typeface="微软雅黑"/>
+              </a:rPr>
+              <a:t>错在哪一步可以精确指出来：走到第 4 行那个 4 时，上一行两个候选是 13（奇）和 18（偶），朴素状态只留 18 —— 而答案 17 = 13 + 4，要的恰恰是被扔掉的那个</a:t>
+            </a:r>
+          </a:p>
+        </p:txBody>
+      </p:sp>
+      <p:sp>
+        <p:nvSpPr>
+          <p:cNvPr id="7" name="TextBox 6"/>
+          <p:cNvSpPr txBox="1"/>
+          <p:nvPr/>
+        </p:nvSpPr>
+        <p:spPr>
+          <a:xfrm>
+            <a:off x="566928" y="6327648"/>
+            <a:ext cx="8229600" cy="310896"/>
+          </a:xfrm>
+          <a:prstGeom prst="rect">
+            <a:avLst/>
+          </a:prstGeom>
+          <a:noFill/>
+        </p:spPr>
+        <p:txBody>
+          <a:bodyPr wrap="square" lIns="0" rIns="0" tIns="0" bIns="0">
+            <a:noAutofit/>
+          </a:bodyPr>
+          <a:lstStyle/>
+          <a:p>
+            <a:pPr algn="l">
+              <a:spcBef>
+                <a:spcPts val="0"/>
+              </a:spcBef>
+              <a:spcAft>
+                <a:spcPts val="0"/>
+              </a:spcAft>
+            </a:pPr>
+            <a:r>
+              <a:rPr sz="1000" b="0" i="0">
+                <a:solidFill>
+                  <a:srgbClr val="6B7582"/>
+                </a:solidFill>
+                <a:latin typeface="Segoe UI"/>
+                <a:ea typeface="微软雅黑"/>
+              </a:rPr>
+              <a:t>计算概论（B） · 第10周 · 闫宏飞 · 2026 Fall</a:t>
+            </a:r>
+          </a:p>
+        </p:txBody>
+      </p:sp>
+      <p:sp>
+        <p:nvSpPr>
+          <p:cNvPr id="8" name="TextBox 7"/>
+          <p:cNvSpPr txBox="1"/>
+          <p:nvPr/>
+        </p:nvSpPr>
+        <p:spPr>
+          <a:xfrm>
+            <a:off x="10710367" y="6327648"/>
+            <a:ext cx="914400" cy="310896"/>
+          </a:xfrm>
+          <a:prstGeom prst="rect">
+            <a:avLst/>
+          </a:prstGeom>
+          <a:noFill/>
+        </p:spPr>
+        <p:txBody>
+          <a:bodyPr wrap="square" lIns="0" rIns="0" tIns="0" bIns="0">
+            <a:noAutofit/>
+          </a:bodyPr>
+          <a:lstStyle/>
+          <a:p>
+            <a:pPr algn="r">
+              <a:spcBef>
+                <a:spcPts val="0"/>
+              </a:spcBef>
+              <a:spcAft>
+                <a:spcPts val="0"/>
+              </a:spcAft>
+            </a:pPr>
+            <a:r>
+              <a:rPr sz="1000" b="0" i="0">
+                <a:solidFill>
+                  <a:srgbClr val="6B7582"/>
+                </a:solidFill>
+                <a:latin typeface="Segoe UI"/>
+                <a:ea typeface="微软雅黑"/>
+              </a:rPr>
+              <a:t>17</a:t>
+            </a:r>
+          </a:p>
+        </p:txBody>
+      </p:sp>
+    </p:spTree>
+  </p:cSld>
+  <p:clrMapOvr>
+    <a:masterClrMapping/>
+  </p:clrMapOvr>
+</p:sld>
+</file>
+
+<file path=ppt/slides/slide18.xml><?xml version="1.0" encoding="utf-8"?>
+<p:sld xmlns:a="http://schemas.openxmlformats.org/drawingml/2006/main" xmlns:p="http://schemas.openxmlformats.org/presentationml/2006/main" xmlns:r="http://schemas.openxmlformats.org/officeDocument/2006/relationships">
+  <p:cSld>
+    <p:spTree>
+      <p:nvGrpSpPr>
+        <p:cNvPr id="1" name=""/>
+        <p:cNvGrpSpPr/>
+        <p:nvPr/>
+      </p:nvGrpSpPr>
+      <p:grpSpPr/>
+      <p:sp>
+        <p:nvSpPr>
+          <p:cNvPr id="2" name="TextBox 1"/>
+          <p:cNvSpPr txBox="1"/>
+          <p:nvPr/>
+        </p:nvSpPr>
+        <p:spPr>
+          <a:xfrm>
+            <a:off x="566928" y="420624"/>
+            <a:ext cx="11057839" cy="548640"/>
+          </a:xfrm>
+          <a:prstGeom prst="rect">
+            <a:avLst/>
+          </a:prstGeom>
+          <a:noFill/>
+        </p:spPr>
+        <p:txBody>
+          <a:bodyPr wrap="square" lIns="0" rIns="0" tIns="0" bIns="0">
+            <a:noAutofit/>
+          </a:bodyPr>
+          <a:lstStyle/>
+          <a:p>
+            <a:pPr algn="l">
+              <a:spcBef>
+                <a:spcPts val="0"/>
+              </a:spcBef>
+              <a:spcAft>
+                <a:spcPts val="0"/>
+              </a:spcAft>
+            </a:pPr>
+            <a:r>
+              <a:rPr sz="2600" b="1" i="0">
+                <a:solidFill>
+                  <a:srgbClr val="12395B"/>
+                </a:solidFill>
+                <a:latin typeface="Segoe UI"/>
+                <a:ea typeface="微软雅黑"/>
+              </a:rPr>
+              <a:t>补一维，最优子结构就回来了</a:t>
+            </a:r>
+          </a:p>
+        </p:txBody>
+      </p:sp>
+      <p:sp>
+        <p:nvSpPr>
+          <p:cNvPr id="3" name="Rectangle 2"/>
+          <p:cNvSpPr/>
+          <p:nvPr/>
+        </p:nvSpPr>
+        <p:spPr>
+          <a:xfrm>
+            <a:off x="566928" y="1060704"/>
+            <a:ext cx="960120" cy="40640"/>
+          </a:xfrm>
+          <a:prstGeom prst="rect">
+            <a:avLst/>
+          </a:prstGeom>
+          <a:solidFill>
+            <a:srgbClr val="E07B39"/>
+          </a:solidFill>
+          <a:ln>
+            <a:noFill/>
+          </a:ln>
+          <a:effectLst/>
+        </p:spPr>
+        <p:style>
+          <a:lnRef idx="1">
+            <a:schemeClr val="accent1"/>
+          </a:lnRef>
+          <a:fillRef idx="3">
+            <a:schemeClr val="accent1"/>
+          </a:fillRef>
+          <a:effectRef idx="2">
+            <a:schemeClr val="accent1"/>
+          </a:effectRef>
+          <a:fontRef idx="minor">
+            <a:schemeClr val="lt1"/>
+          </a:fontRef>
+        </p:style>
+        <p:txBody>
+          <a:bodyPr rtlCol="0" anchor="ctr"/>
+          <a:lstStyle/>
+          <a:p>
+            <a:pPr algn="ctr"/>
+          </a:p>
+        </p:txBody>
+      </p:sp>
+      <p:sp>
+        <p:nvSpPr>
+          <p:cNvPr id="4" name="TextBox 3"/>
+          <p:cNvSpPr txBox="1"/>
+          <p:nvPr/>
+        </p:nvSpPr>
+        <p:spPr>
+          <a:xfrm>
+            <a:off x="566928" y="1298448"/>
+            <a:ext cx="11057839" cy="4864608"/>
+          </a:xfrm>
+          <a:prstGeom prst="rect">
+            <a:avLst/>
+          </a:prstGeom>
+          <a:noFill/>
+        </p:spPr>
+        <p:txBody>
+          <a:bodyPr wrap="square" lIns="0" rIns="0" tIns="0" bIns="0">
+            <a:noAutofit/>
+          </a:bodyPr>
+          <a:lstStyle/>
+          <a:p>
+            <a:pPr algn="l">
+              <a:lnSpc>
+                <a:spcPct val="132000"/>
+              </a:lnSpc>
+              <a:spcBef>
+                <a:spcPts val="0"/>
+              </a:spcBef>
+              <a:spcAft>
+                <a:spcPts val="1240"/>
+              </a:spcAft>
+            </a:pPr>
+            <a:r>
+              <a:rPr sz="2000" b="0" i="0">
+                <a:solidFill>
+                  <a:srgbClr val="242A33"/>
+                </a:solidFill>
+                <a:latin typeface="Segoe UI"/>
+                <a:ea typeface="微软雅黑"/>
+              </a:rPr>
+              <a:t>•  </a:t>
+            </a:r>
+            <a:r>
+              <a:rPr sz="1879" b="0" i="0">
+                <a:solidFill>
+                  <a:srgbClr val="242A33"/>
+                </a:solidFill>
+                <a:latin typeface="Consolas"/>
+                <a:ea typeface="Consolas"/>
+              </a:rPr>
+              <a:t>dp[i][j][p]</a:t>
+            </a:r>
+            <a:r>
+              <a:rPr sz="2000" b="0" i="0">
+                <a:solidFill>
+                  <a:srgbClr val="242A33"/>
+                </a:solidFill>
+                <a:latin typeface="Segoe UI"/>
+                <a:ea typeface="微软雅黑"/>
+              </a:rPr>
+              <a:t> = 到 (i, j) 且路径和奇偶为 </a:t>
+            </a:r>
+            <a:r>
+              <a:rPr sz="2000" b="1" i="0">
+                <a:solidFill>
+                  <a:srgbClr val="12395B"/>
+                </a:solidFill>
+                <a:latin typeface="Segoe UI"/>
+                <a:ea typeface="微软雅黑"/>
+              </a:rPr>
+              <a:t>p</a:t>
+            </a:r>
+            <a:r>
+              <a:rPr sz="2000" b="0" i="0">
+                <a:solidFill>
+                  <a:srgbClr val="242A33"/>
+                </a:solidFill>
+                <a:latin typeface="Segoe UI"/>
+                <a:ea typeface="微软雅黑"/>
+              </a:rPr>
+              <a:t> 的最大和 —— 同一道题、同一套转移</a:t>
+            </a:r>
+          </a:p>
+          <a:p>
+            <a:pPr algn="l">
+              <a:lnSpc>
+                <a:spcPct val="132000"/>
+              </a:lnSpc>
+              <a:spcBef>
+                <a:spcPts val="0"/>
+              </a:spcBef>
+              <a:spcAft>
+                <a:spcPts val="1240"/>
+              </a:spcAft>
+            </a:pPr>
+            <a:r>
+              <a:rPr sz="2000" b="1" i="0">
+                <a:solidFill>
+                  <a:srgbClr val="12395B"/>
+                </a:solidFill>
+                <a:latin typeface="Segoe UI"/>
+                <a:ea typeface="微软雅黑"/>
+              </a:rPr>
+              <a:t>▍ 子问题的最优解（18）在父问题里不但没用，还挤掉了真正有用的次优解（13）</a:t>
+            </a:r>
+          </a:p>
+          <a:p>
+            <a:pPr algn="l">
+              <a:lnSpc>
+                <a:spcPct val="132000"/>
+              </a:lnSpc>
+              <a:spcBef>
+                <a:spcPts val="0"/>
+              </a:spcBef>
+              <a:spcAft>
+                <a:spcPts val="1240"/>
+              </a:spcAft>
+            </a:pPr>
+            <a:r>
+              <a:rPr sz="2000" b="0" i="0">
+                <a:solidFill>
+                  <a:srgbClr val="242A33"/>
+                </a:solidFill>
+                <a:latin typeface="Segoe UI"/>
+                <a:ea typeface="微软雅黑"/>
+              </a:rPr>
+              <a:t>•  这就是"没有最优子结构"的真实长相：不是题目不能 DP，是状态漏了信息</a:t>
+            </a:r>
+          </a:p>
+          <a:p>
+            <a:pPr algn="l">
+              <a:lnSpc>
+                <a:spcPct val="132000"/>
+              </a:lnSpc>
+              <a:spcBef>
+                <a:spcPts val="0"/>
+              </a:spcBef>
+              <a:spcAft>
+                <a:spcPts val="1240"/>
+              </a:spcAft>
+            </a:pPr>
+            <a:r>
+              <a:rPr sz="2000" b="0" i="0">
+                <a:solidFill>
+                  <a:srgbClr val="242A33"/>
+                </a:solidFill>
+                <a:latin typeface="Segoe UI"/>
+                <a:ea typeface="微软雅黑"/>
+              </a:rPr>
+              <a:t>•  </a:t>
+            </a:r>
+            <a:r>
+              <a:rPr sz="2000" b="1" i="0">
+                <a:solidFill>
+                  <a:srgbClr val="12395B"/>
+                </a:solidFill>
+                <a:latin typeface="Segoe UI"/>
+                <a:ea typeface="微软雅黑"/>
+              </a:rPr>
+              <a:t>检验办法</a:t>
+            </a:r>
+            <a:r>
+              <a:rPr sz="2000" b="0" i="0">
+                <a:solidFill>
+                  <a:srgbClr val="242A33"/>
+                </a:solidFill>
+                <a:latin typeface="Segoe UI"/>
+                <a:ea typeface="微软雅黑"/>
+              </a:rPr>
+              <a:t>：把某个子问题的最优解换成次优解，父问题会不会反而更好？能构造出来，就是少了一维</a:t>
+            </a:r>
+          </a:p>
+          <a:p>
+            <a:pPr algn="l">
+              <a:lnSpc>
+                <a:spcPct val="132000"/>
+              </a:lnSpc>
+              <a:spcBef>
+                <a:spcPts val="0"/>
+              </a:spcBef>
+              <a:spcAft>
+                <a:spcPts val="1240"/>
+              </a:spcAft>
+            </a:pPr>
+            <a:r>
+              <a:rPr sz="2000" b="0" i="0">
+                <a:solidFill>
+                  <a:srgbClr val="242A33"/>
+                </a:solidFill>
+                <a:latin typeface="Segoe UI"/>
+                <a:ea typeface="微软雅黑"/>
+              </a:rPr>
+              <a:t>•  常缺的那一维：</a:t>
+            </a:r>
+            <a:r>
+              <a:rPr sz="2000" b="1" i="0">
+                <a:solidFill>
+                  <a:srgbClr val="12395B"/>
+                </a:solidFill>
+                <a:latin typeface="Segoe UI"/>
+                <a:ea typeface="微软雅黑"/>
+              </a:rPr>
+              <a:t>奇偶、剩余容量、已用次数、上一步选了什么、当前第几段</a:t>
+            </a:r>
+          </a:p>
+          <a:p>
+            <a:pPr algn="l">
+              <a:lnSpc>
+                <a:spcPct val="132000"/>
+              </a:lnSpc>
+              <a:spcBef>
+                <a:spcPts val="0"/>
+              </a:spcBef>
+              <a:spcAft>
+                <a:spcPts val="1240"/>
+              </a:spcAft>
+            </a:pPr>
+            <a:r>
+              <a:rPr sz="2000" b="0" i="0">
+                <a:solidFill>
+                  <a:srgbClr val="242A33"/>
+                </a:solidFill>
+                <a:latin typeface="Segoe UI"/>
+                <a:ea typeface="微软雅黑"/>
+              </a:rPr>
+              <a:t>•  第 12 周讲义 §1.1 有个</a:t>
+            </a:r>
+            <a:r>
+              <a:rPr sz="2000" b="1" i="0">
+                <a:solidFill>
+                  <a:srgbClr val="12395B"/>
+                </a:solidFill>
+                <a:latin typeface="Segoe UI"/>
+                <a:ea typeface="微软雅黑"/>
+              </a:rPr>
+              <a:t>真的</a:t>
+            </a:r>
+            <a:r>
+              <a:rPr sz="2000" b="0" i="0">
+                <a:solidFill>
+                  <a:srgbClr val="242A33"/>
+                </a:solidFill>
+                <a:latin typeface="Segoe UI"/>
+                <a:ea typeface="微软雅黑"/>
+              </a:rPr>
+              <a:t>救不回来的例子：一般图上的最长简单路径</a:t>
+            </a:r>
+          </a:p>
+        </p:txBody>
+      </p:sp>
+      <p:sp>
+        <p:nvSpPr>
+          <p:cNvPr id="5" name="TextBox 4"/>
+          <p:cNvSpPr txBox="1"/>
+          <p:nvPr/>
+        </p:nvSpPr>
+        <p:spPr>
+          <a:xfrm>
+            <a:off x="566928" y="6327648"/>
+            <a:ext cx="8229600" cy="310896"/>
+          </a:xfrm>
+          <a:prstGeom prst="rect">
+            <a:avLst/>
+          </a:prstGeom>
+          <a:noFill/>
+        </p:spPr>
+        <p:txBody>
+          <a:bodyPr wrap="square" lIns="0" rIns="0" tIns="0" bIns="0">
+            <a:noAutofit/>
+          </a:bodyPr>
+          <a:lstStyle/>
+          <a:p>
+            <a:pPr algn="l">
+              <a:spcBef>
+                <a:spcPts val="0"/>
+              </a:spcBef>
+              <a:spcAft>
+                <a:spcPts val="0"/>
+              </a:spcAft>
+            </a:pPr>
+            <a:r>
+              <a:rPr sz="1000" b="0" i="0">
+                <a:solidFill>
+                  <a:srgbClr val="6B7582"/>
+                </a:solidFill>
+                <a:latin typeface="Segoe UI"/>
+                <a:ea typeface="微软雅黑"/>
+              </a:rPr>
+              <a:t>计算概论（B） · 第10周 · 闫宏飞 · 2026 Fall</a:t>
+            </a:r>
+          </a:p>
+        </p:txBody>
+      </p:sp>
+      <p:sp>
+        <p:nvSpPr>
+          <p:cNvPr id="6" name="TextBox 5"/>
+          <p:cNvSpPr txBox="1"/>
+          <p:nvPr/>
+        </p:nvSpPr>
+        <p:spPr>
+          <a:xfrm>
+            <a:off x="10710367" y="6327648"/>
+            <a:ext cx="914400" cy="310896"/>
+          </a:xfrm>
+          <a:prstGeom prst="rect">
+            <a:avLst/>
+          </a:prstGeom>
+          <a:noFill/>
+        </p:spPr>
+        <p:txBody>
+          <a:bodyPr wrap="square" lIns="0" rIns="0" tIns="0" bIns="0">
+            <a:noAutofit/>
+          </a:bodyPr>
+          <a:lstStyle/>
+          <a:p>
+            <a:pPr algn="r">
+              <a:spcBef>
+                <a:spcPts val="0"/>
+              </a:spcBef>
+              <a:spcAft>
+                <a:spcPts val="0"/>
+              </a:spcAft>
+            </a:pPr>
+            <a:r>
+              <a:rPr sz="1000" b="0" i="0">
+                <a:solidFill>
+                  <a:srgbClr val="6B7582"/>
+                </a:solidFill>
+                <a:latin typeface="Segoe UI"/>
+                <a:ea typeface="微软雅黑"/>
+              </a:rPr>
+              <a:t>18</a:t>
+            </a:r>
+          </a:p>
+        </p:txBody>
+      </p:sp>
+    </p:spTree>
+  </p:cSld>
+  <p:clrMapOvr>
+    <a:masterClrMapping/>
+  </p:clrMapOvr>
+</p:sld>
+</file>
+
+<file path=ppt/slides/slide19.xml><?xml version="1.0" encoding="utf-8"?>
 <p:sld xmlns:a="http://schemas.openxmlformats.org/drawingml/2006/main" xmlns:p="http://schemas.openxmlformats.org/presentationml/2006/main" xmlns:r="http://schemas.openxmlformats.org/officeDocument/2006/relationships">
   <p:cSld>
     <p:spTree>
@@ -6910,7 +8718,7 @@
                 <a:latin typeface="Segoe UI"/>
                 <a:ea typeface="微软雅黑"/>
               </a:rPr>
-              <a:t>15</a:t>
+              <a:t>19</a:t>
             </a:r>
           </a:p>
         </p:txBody>
@@ -6923,7 +8731,176 @@
 </p:sld>
 </file>
 
-<file path=ppt/slides/slide16.xml><?xml version="1.0" encoding="utf-8"?>
+<file path=ppt/slides/slide2.xml><?xml version="1.0" encoding="utf-8"?>
+<p:sld xmlns:a="http://schemas.openxmlformats.org/drawingml/2006/main" xmlns:p="http://schemas.openxmlformats.org/presentationml/2006/main" xmlns:r="http://schemas.openxmlformats.org/officeDocument/2006/relationships">
+  <p:cSld>
+    <p:spTree>
+      <p:nvGrpSpPr>
+        <p:cNvPr id="1" name=""/>
+        <p:cNvGrpSpPr/>
+        <p:nvPr/>
+      </p:nvGrpSpPr>
+      <p:grpSpPr/>
+      <p:sp>
+        <p:nvSpPr>
+          <p:cNvPr id="2" name="Rectangle 1"/>
+          <p:cNvSpPr/>
+          <p:nvPr/>
+        </p:nvSpPr>
+        <p:spPr>
+          <a:xfrm>
+            <a:off x="0" y="0"/>
+            <a:ext cx="12191695" cy="6858000"/>
+          </a:xfrm>
+          <a:prstGeom prst="rect">
+            <a:avLst/>
+          </a:prstGeom>
+          <a:solidFill>
+            <a:srgbClr val="F2F4F7"/>
+          </a:solidFill>
+          <a:ln>
+            <a:noFill/>
+          </a:ln>
+          <a:effectLst/>
+        </p:spPr>
+        <p:style>
+          <a:lnRef idx="1">
+            <a:schemeClr val="accent1"/>
+          </a:lnRef>
+          <a:fillRef idx="3">
+            <a:schemeClr val="accent1"/>
+          </a:fillRef>
+          <a:effectRef idx="2">
+            <a:schemeClr val="accent1"/>
+          </a:effectRef>
+          <a:fontRef idx="minor">
+            <a:schemeClr val="lt1"/>
+          </a:fontRef>
+        </p:style>
+        <p:txBody>
+          <a:bodyPr rtlCol="0" anchor="ctr"/>
+          <a:lstStyle/>
+          <a:p>
+            <a:pPr algn="ctr"/>
+          </a:p>
+        </p:txBody>
+      </p:sp>
+      <p:sp>
+        <p:nvSpPr>
+          <p:cNvPr id="3" name="Rectangle 2"/>
+          <p:cNvSpPr/>
+          <p:nvPr/>
+        </p:nvSpPr>
+        <p:spPr>
+          <a:xfrm>
+            <a:off x="0" y="2331720"/>
+            <a:ext cx="274320" cy="1737360"/>
+          </a:xfrm>
+          <a:prstGeom prst="rect">
+            <a:avLst/>
+          </a:prstGeom>
+          <a:solidFill>
+            <a:srgbClr val="E07B39"/>
+          </a:solidFill>
+          <a:ln>
+            <a:noFill/>
+          </a:ln>
+          <a:effectLst/>
+        </p:spPr>
+        <p:style>
+          <a:lnRef idx="1">
+            <a:schemeClr val="accent1"/>
+          </a:lnRef>
+          <a:fillRef idx="3">
+            <a:schemeClr val="accent1"/>
+          </a:fillRef>
+          <a:effectRef idx="2">
+            <a:schemeClr val="accent1"/>
+          </a:effectRef>
+          <a:fontRef idx="minor">
+            <a:schemeClr val="lt1"/>
+          </a:fontRef>
+        </p:style>
+        <p:txBody>
+          <a:bodyPr rtlCol="0" anchor="ctr"/>
+          <a:lstStyle/>
+          <a:p>
+            <a:pPr algn="ctr"/>
+          </a:p>
+        </p:txBody>
+      </p:sp>
+      <p:sp>
+        <p:nvSpPr>
+          <p:cNvPr id="4" name="TextBox 3"/>
+          <p:cNvSpPr txBox="1"/>
+          <p:nvPr/>
+        </p:nvSpPr>
+        <p:spPr>
+          <a:xfrm>
+            <a:off x="868680" y="2395728"/>
+            <a:ext cx="10424160" cy="1737360"/>
+          </a:xfrm>
+          <a:prstGeom prst="rect">
+            <a:avLst/>
+          </a:prstGeom>
+          <a:noFill/>
+        </p:spPr>
+        <p:txBody>
+          <a:bodyPr wrap="square" lIns="0" rIns="0" tIns="0" bIns="0">
+            <a:noAutofit/>
+          </a:bodyPr>
+          <a:lstStyle/>
+          <a:p>
+            <a:pPr algn="l">
+              <a:spcBef>
+                <a:spcPts val="0"/>
+              </a:spcBef>
+              <a:spcAft>
+                <a:spcPts val="800"/>
+              </a:spcAft>
+            </a:pPr>
+            <a:r>
+              <a:rPr sz="1500" b="1" i="0">
+                <a:solidFill>
+                  <a:srgbClr val="E07B39"/>
+                </a:solidFill>
+                <a:latin typeface="Segoe UI"/>
+                <a:ea typeface="微软雅黑"/>
+              </a:rPr>
+              <a:t>第 1 节</a:t>
+            </a:r>
+          </a:p>
+          <a:p>
+            <a:pPr algn="l">
+              <a:spcBef>
+                <a:spcPts val="0"/>
+              </a:spcBef>
+              <a:spcAft>
+                <a:spcPts val="800"/>
+              </a:spcAft>
+            </a:pPr>
+            <a:r>
+              <a:rPr sz="3400" b="1" i="0">
+                <a:solidFill>
+                  <a:srgbClr val="12395B"/>
+                </a:solidFill>
+                <a:latin typeface="Segoe UI"/>
+                <a:ea typeface="微软雅黑"/>
+              </a:rPr>
+              <a:t>区间问题</a:t>
+            </a:r>
+          </a:p>
+        </p:txBody>
+      </p:sp>
+    </p:spTree>
+  </p:cSld>
+  <p:clrMapOvr>
+    <a:masterClrMapping/>
+  </p:clrMapOvr>
+</p:sld>
+</file>
+
+<file path=ppt/slides/slide20.xml><?xml version="1.0" encoding="utf-8"?>
 <p:sld xmlns:a="http://schemas.openxmlformats.org/drawingml/2006/main" xmlns:p="http://schemas.openxmlformats.org/presentationml/2006/main" xmlns:r="http://schemas.openxmlformats.org/officeDocument/2006/relationships">
   <p:cSld>
     <p:spTree>
@@ -7862,7 +9839,7 @@
                 <a:latin typeface="Segoe UI"/>
                 <a:ea typeface="微软雅黑"/>
               </a:rPr>
-              <a:t>16</a:t>
+              <a:t>20</a:t>
             </a:r>
           </a:p>
         </p:txBody>
@@ -7875,7 +9852,7 @@
 </p:sld>
 </file>
 
-<file path=ppt/slides/slide17.xml><?xml version="1.0" encoding="utf-8"?>
+<file path=ppt/slides/slide21.xml><?xml version="1.0" encoding="utf-8"?>
 <p:sld xmlns:a="http://schemas.openxmlformats.org/drawingml/2006/main" xmlns:p="http://schemas.openxmlformats.org/presentationml/2006/main" xmlns:r="http://schemas.openxmlformats.org/officeDocument/2006/relationships">
   <p:cSld>
     <p:spTree>
@@ -8187,7 +10164,7 @@
                 <a:latin typeface="Segoe UI"/>
                 <a:ea typeface="微软雅黑"/>
               </a:rPr>
-              <a:t>17</a:t>
+              <a:t>21</a:t>
             </a:r>
           </a:p>
         </p:txBody>
@@ -8200,7 +10177,7 @@
 </p:sld>
 </file>
 
-<file path=ppt/slides/slide18.xml><?xml version="1.0" encoding="utf-8"?>
+<file path=ppt/slides/slide22.xml><?xml version="1.0" encoding="utf-8"?>
 <p:sld xmlns:a="http://schemas.openxmlformats.org/drawingml/2006/main" xmlns:p="http://schemas.openxmlformats.org/presentationml/2006/main" xmlns:r="http://schemas.openxmlformats.org/officeDocument/2006/relationships">
   <p:cSld>
     <p:spTree>
@@ -8904,7 +10881,7 @@
                 <a:latin typeface="Segoe UI"/>
                 <a:ea typeface="微软雅黑"/>
               </a:rPr>
-              <a:t>18</a:t>
+              <a:t>22</a:t>
             </a:r>
           </a:p>
         </p:txBody>
@@ -8917,7 +10894,7 @@
 </p:sld>
 </file>
 
-<file path=ppt/slides/slide19.xml><?xml version="1.0" encoding="utf-8"?>
+<file path=ppt/slides/slide23.xml><?xml version="1.0" encoding="utf-8"?>
 <p:sld xmlns:a="http://schemas.openxmlformats.org/drawingml/2006/main" xmlns:p="http://schemas.openxmlformats.org/presentationml/2006/main" xmlns:r="http://schemas.openxmlformats.org/officeDocument/2006/relationships">
   <p:cSld>
     <p:spTree>
@@ -9348,7 +11325,7 @@
                 <a:latin typeface="Segoe UI"/>
                 <a:ea typeface="微软雅黑"/>
               </a:rPr>
-              <a:t>19</a:t>
+              <a:t>23</a:t>
             </a:r>
           </a:p>
         </p:txBody>
@@ -9361,176 +11338,7 @@
 </p:sld>
 </file>
 
-<file path=ppt/slides/slide2.xml><?xml version="1.0" encoding="utf-8"?>
-<p:sld xmlns:a="http://schemas.openxmlformats.org/drawingml/2006/main" xmlns:p="http://schemas.openxmlformats.org/presentationml/2006/main" xmlns:r="http://schemas.openxmlformats.org/officeDocument/2006/relationships">
-  <p:cSld>
-    <p:spTree>
-      <p:nvGrpSpPr>
-        <p:cNvPr id="1" name=""/>
-        <p:cNvGrpSpPr/>
-        <p:nvPr/>
-      </p:nvGrpSpPr>
-      <p:grpSpPr/>
-      <p:sp>
-        <p:nvSpPr>
-          <p:cNvPr id="2" name="Rectangle 1"/>
-          <p:cNvSpPr/>
-          <p:nvPr/>
-        </p:nvSpPr>
-        <p:spPr>
-          <a:xfrm>
-            <a:off x="0" y="0"/>
-            <a:ext cx="12191695" cy="6858000"/>
-          </a:xfrm>
-          <a:prstGeom prst="rect">
-            <a:avLst/>
-          </a:prstGeom>
-          <a:solidFill>
-            <a:srgbClr val="F2F4F7"/>
-          </a:solidFill>
-          <a:ln>
-            <a:noFill/>
-          </a:ln>
-          <a:effectLst/>
-        </p:spPr>
-        <p:style>
-          <a:lnRef idx="1">
-            <a:schemeClr val="accent1"/>
-          </a:lnRef>
-          <a:fillRef idx="3">
-            <a:schemeClr val="accent1"/>
-          </a:fillRef>
-          <a:effectRef idx="2">
-            <a:schemeClr val="accent1"/>
-          </a:effectRef>
-          <a:fontRef idx="minor">
-            <a:schemeClr val="lt1"/>
-          </a:fontRef>
-        </p:style>
-        <p:txBody>
-          <a:bodyPr rtlCol="0" anchor="ctr"/>
-          <a:lstStyle/>
-          <a:p>
-            <a:pPr algn="ctr"/>
-          </a:p>
-        </p:txBody>
-      </p:sp>
-      <p:sp>
-        <p:nvSpPr>
-          <p:cNvPr id="3" name="Rectangle 2"/>
-          <p:cNvSpPr/>
-          <p:nvPr/>
-        </p:nvSpPr>
-        <p:spPr>
-          <a:xfrm>
-            <a:off x="0" y="2331720"/>
-            <a:ext cx="274320" cy="1737360"/>
-          </a:xfrm>
-          <a:prstGeom prst="rect">
-            <a:avLst/>
-          </a:prstGeom>
-          <a:solidFill>
-            <a:srgbClr val="E07B39"/>
-          </a:solidFill>
-          <a:ln>
-            <a:noFill/>
-          </a:ln>
-          <a:effectLst/>
-        </p:spPr>
-        <p:style>
-          <a:lnRef idx="1">
-            <a:schemeClr val="accent1"/>
-          </a:lnRef>
-          <a:fillRef idx="3">
-            <a:schemeClr val="accent1"/>
-          </a:fillRef>
-          <a:effectRef idx="2">
-            <a:schemeClr val="accent1"/>
-          </a:effectRef>
-          <a:fontRef idx="minor">
-            <a:schemeClr val="lt1"/>
-          </a:fontRef>
-        </p:style>
-        <p:txBody>
-          <a:bodyPr rtlCol="0" anchor="ctr"/>
-          <a:lstStyle/>
-          <a:p>
-            <a:pPr algn="ctr"/>
-          </a:p>
-        </p:txBody>
-      </p:sp>
-      <p:sp>
-        <p:nvSpPr>
-          <p:cNvPr id="4" name="TextBox 3"/>
-          <p:cNvSpPr txBox="1"/>
-          <p:nvPr/>
-        </p:nvSpPr>
-        <p:spPr>
-          <a:xfrm>
-            <a:off x="868680" y="2395728"/>
-            <a:ext cx="10424160" cy="1737360"/>
-          </a:xfrm>
-          <a:prstGeom prst="rect">
-            <a:avLst/>
-          </a:prstGeom>
-          <a:noFill/>
-        </p:spPr>
-        <p:txBody>
-          <a:bodyPr wrap="square" lIns="0" rIns="0" tIns="0" bIns="0">
-            <a:noAutofit/>
-          </a:bodyPr>
-          <a:lstStyle/>
-          <a:p>
-            <a:pPr algn="l">
-              <a:spcBef>
-                <a:spcPts val="0"/>
-              </a:spcBef>
-              <a:spcAft>
-                <a:spcPts val="800"/>
-              </a:spcAft>
-            </a:pPr>
-            <a:r>
-              <a:rPr sz="1500" b="1" i="0">
-                <a:solidFill>
-                  <a:srgbClr val="E07B39"/>
-                </a:solidFill>
-                <a:latin typeface="Segoe UI"/>
-                <a:ea typeface="微软雅黑"/>
-              </a:rPr>
-              <a:t>第 1 节</a:t>
-            </a:r>
-          </a:p>
-          <a:p>
-            <a:pPr algn="l">
-              <a:spcBef>
-                <a:spcPts val="0"/>
-              </a:spcBef>
-              <a:spcAft>
-                <a:spcPts val="800"/>
-              </a:spcAft>
-            </a:pPr>
-            <a:r>
-              <a:rPr sz="3400" b="1" i="0">
-                <a:solidFill>
-                  <a:srgbClr val="12395B"/>
-                </a:solidFill>
-                <a:latin typeface="Segoe UI"/>
-                <a:ea typeface="微软雅黑"/>
-              </a:rPr>
-              <a:t>区间问题</a:t>
-            </a:r>
-          </a:p>
-        </p:txBody>
-      </p:sp>
-    </p:spTree>
-  </p:cSld>
-  <p:clrMapOvr>
-    <a:masterClrMapping/>
-  </p:clrMapOvr>
-</p:sld>
-</file>
-
-<file path=ppt/slides/slide20.xml><?xml version="1.0" encoding="utf-8"?>
+<file path=ppt/slides/slide24.xml><?xml version="1.0" encoding="utf-8"?>
 <p:sld xmlns:a="http://schemas.openxmlformats.org/drawingml/2006/main" xmlns:p="http://schemas.openxmlformats.org/presentationml/2006/main" xmlns:r="http://schemas.openxmlformats.org/officeDocument/2006/relationships">
   <p:cSld>
     <p:spTree>
@@ -10257,7 +12065,7 @@
                 <a:latin typeface="Segoe UI"/>
                 <a:ea typeface="微软雅黑"/>
               </a:rPr>
-              <a:t>20</a:t>
+              <a:t>24</a:t>
             </a:r>
           </a:p>
         </p:txBody>
@@ -10270,7 +12078,7 @@
 </p:sld>
 </file>
 
-<file path=ppt/slides/slide21.xml><?xml version="1.0" encoding="utf-8"?>
+<file path=ppt/slides/slide25.xml><?xml version="1.0" encoding="utf-8"?>
 <p:sld xmlns:a="http://schemas.openxmlformats.org/drawingml/2006/main" xmlns:p="http://schemas.openxmlformats.org/presentationml/2006/main" xmlns:r="http://schemas.openxmlformats.org/officeDocument/2006/relationships">
   <p:cSld>
     <p:spTree>
@@ -10951,7 +12759,7 @@
                 <a:latin typeface="Segoe UI"/>
                 <a:ea typeface="微软雅黑"/>
               </a:rPr>
-              <a:t>21</a:t>
+              <a:t>25</a:t>
             </a:r>
           </a:p>
         </p:txBody>
@@ -10964,7 +12772,7 @@
 </p:sld>
 </file>
 
-<file path=ppt/slides/slide22.xml><?xml version="1.0" encoding="utf-8"?>
+<file path=ppt/slides/slide26.xml><?xml version="1.0" encoding="utf-8"?>
 <p:sld xmlns:a="http://schemas.openxmlformats.org/drawingml/2006/main" xmlns:p="http://schemas.openxmlformats.org/presentationml/2006/main" xmlns:r="http://schemas.openxmlformats.org/officeDocument/2006/relationships">
   <p:cSld>
     <p:spTree>
@@ -11276,7 +13084,7 @@
                 <a:latin typeface="Segoe UI"/>
                 <a:ea typeface="微软雅黑"/>
               </a:rPr>
-              <a:t>22</a:t>
+              <a:t>26</a:t>
             </a:r>
           </a:p>
         </p:txBody>
@@ -11289,7 +13097,7 @@
 </p:sld>
 </file>
 
-<file path=ppt/slides/slide23.xml><?xml version="1.0" encoding="utf-8"?>
+<file path=ppt/slides/slide27.xml><?xml version="1.0" encoding="utf-8"?>
 <p:sld xmlns:a="http://schemas.openxmlformats.org/drawingml/2006/main" xmlns:p="http://schemas.openxmlformats.org/presentationml/2006/main" xmlns:r="http://schemas.openxmlformats.org/officeDocument/2006/relationships">
   <p:cSld>
     <p:spTree>
@@ -12323,7 +14131,7 @@
                 <a:latin typeface="Segoe UI"/>
                 <a:ea typeface="微软雅黑"/>
               </a:rPr>
-              <a:t>23</a:t>
+              <a:t>27</a:t>
             </a:r>
           </a:p>
         </p:txBody>
@@ -12336,7 +14144,7 @@
 </p:sld>
 </file>
 
-<file path=ppt/slides/slide24.xml><?xml version="1.0" encoding="utf-8"?>
+<file path=ppt/slides/slide28.xml><?xml version="1.0" encoding="utf-8"?>
 <p:sld xmlns:a="http://schemas.openxmlformats.org/drawingml/2006/main" xmlns:p="http://schemas.openxmlformats.org/presentationml/2006/main" xmlns:r="http://schemas.openxmlformats.org/officeDocument/2006/relationships">
   <p:cSld>
     <p:spTree>
@@ -12592,6 +14400,59 @@
               </a:rPr>
               <a:t>最优子结构 + 重叠子问题</a:t>
             </a:r>
+            <a:r>
+              <a:rPr sz="2000" b="0" i="0">
+                <a:solidFill>
+                  <a:srgbClr val="242A33"/>
+                </a:solidFill>
+                <a:latin typeface="Segoe UI"/>
+                <a:ea typeface="微软雅黑"/>
+              </a:rPr>
+              <a:t>；没有重叠就用分治</a:t>
+            </a:r>
+          </a:p>
+          <a:p>
+            <a:pPr algn="l">
+              <a:lnSpc>
+                <a:spcPct val="132000"/>
+              </a:lnSpc>
+              <a:spcBef>
+                <a:spcPts val="0"/>
+              </a:spcBef>
+              <a:spcAft>
+                <a:spcPts val="1240"/>
+              </a:spcAft>
+            </a:pPr>
+            <a:r>
+              <a:rPr sz="2000" b="0" i="0">
+                <a:solidFill>
+                  <a:srgbClr val="242A33"/>
+                </a:solidFill>
+                <a:latin typeface="Segoe UI"/>
+                <a:ea typeface="微软雅黑"/>
+              </a:rPr>
+              <a:t>•  </a:t>
+            </a:r>
+            <a:r>
+              <a:rPr sz="2000" b="1" i="0">
+                <a:solidFill>
+                  <a:srgbClr val="12395B"/>
+                </a:solidFill>
+                <a:latin typeface="Segoe UI"/>
+                <a:ea typeface="微软雅黑"/>
+              </a:rPr>
+              <a:t>最优子结构是状态定义的性质</a:t>
+            </a:r>
+            <a:r>
+              <a:rPr sz="2000" b="0" i="0">
+                <a:solidFill>
+                  <a:srgbClr val="242A33"/>
+                </a:solidFill>
+                <a:latin typeface="Segoe UI"/>
+                <a:ea typeface="微软雅黑"/>
+              </a:rPr>
+              <a:t>：说没有，多半是自己的状态少了一维</a:t>
+            </a:r>
           </a:p>
           <a:p>
             <a:pPr algn="l">
@@ -12752,7 +14613,7 @@
                 <a:latin typeface="Segoe UI"/>
                 <a:ea typeface="微软雅黑"/>
               </a:rPr>
-              <a:t>24</a:t>
+              <a:t>28</a:t>
             </a:r>
           </a:p>
         </p:txBody>
@@ -12765,7 +14626,7 @@
 </p:sld>
 </file>
 
-<file path=ppt/slides/slide25.xml><?xml version="1.0" encoding="utf-8"?>
+<file path=ppt/slides/slide29.xml><?xml version="1.0" encoding="utf-8"?>
 <p:sld xmlns:a="http://schemas.openxmlformats.org/drawingml/2006/main" xmlns:p="http://schemas.openxmlformats.org/presentationml/2006/main" xmlns:r="http://schemas.openxmlformats.org/officeDocument/2006/relationships">
   <p:cSld>
     <p:spTree>
@@ -13077,7 +14938,7 @@
                 <a:latin typeface="Segoe UI"/>
                 <a:ea typeface="微软雅黑"/>
               </a:rPr>
-              <a:t>25</a:t>
+              <a:t>29</a:t>
             </a:r>
           </a:p>
         </p:txBody>
